--- a/docs/slides/unit09/unit09_praesenz.pptx
+++ b/docs/slides/unit09/unit09_praesenz.pptx
@@ -384,7 +384,7 @@
             <a:pPr indent="0" algn="r">
               <a:buNone/>
             </a:pPr>
-            <a:fld id="{489E2A29-A7F0-48F8-9F77-843BFA2A9219}" type="slidenum">
+            <a:fld id="{9CB9F827-EAC1-4712-B289-C8F78D29347E}" type="slidenum">
               <a:rPr b="0" lang="en-US" sz="1400" spc="-1" strike="noStrike">
                 <a:solidFill>
                   <a:srgbClr val="000000"/>
@@ -6396,7 +6396,7 @@
         <p:txBody>
           <a:bodyPr/>
           <a:p>
-            <a:fld id="{CB5B9F8C-A515-4C9F-AE0C-17C935012D59}" type="slidenum">
+            <a:fld id="{11A835B4-9086-4E0A-A771-576EB1101CDA}" type="slidenum">
               <a:t>&lt;#&gt;</a:t>
             </a:fld>
           </a:p>
@@ -6498,7 +6498,7 @@
         <p:txBody>
           <a:bodyPr/>
           <a:p>
-            <a:fld id="{52E13700-B3EF-4947-ABE3-B9352D8935A2}" type="slidenum">
+            <a:fld id="{EE681C42-A4DF-45F4-8844-1153D8129692}" type="slidenum">
               <a:t>&lt;#&gt;</a:t>
             </a:fld>
           </a:p>
@@ -6560,7 +6560,7 @@
         <p:txBody>
           <a:bodyPr/>
           <a:p>
-            <a:fld id="{CC1E500F-B662-4EDB-9518-035ADDDB70BC}" type="slidenum">
+            <a:fld id="{4128DAD0-D2AE-49A1-BA52-44A6AC737473}" type="slidenum">
               <a:t>&lt;#&gt;</a:t>
             </a:fld>
           </a:p>
@@ -6708,7 +6708,7 @@
         <p:txBody>
           <a:bodyPr/>
           <a:p>
-            <a:fld id="{4D1F3639-3971-4FB5-AF00-5BF5D08DE190}" type="slidenum">
+            <a:fld id="{F82C3DE3-5B75-45A9-AAE8-EE284CF01593}" type="slidenum">
               <a:t>&lt;#&gt;</a:t>
             </a:fld>
           </a:p>
@@ -6770,7 +6770,7 @@
         <p:txBody>
           <a:bodyPr/>
           <a:p>
-            <a:fld id="{AFC883BD-DF14-4E65-BDA8-68B9B93F2705}" type="slidenum">
+            <a:fld id="{EBAA0305-0AD6-48E7-AC0A-A918EAB2C6A3}" type="slidenum">
               <a:t>&lt;#&gt;</a:t>
             </a:fld>
           </a:p>
@@ -6918,7 +6918,7 @@
         <p:txBody>
           <a:bodyPr/>
           <a:p>
-            <a:fld id="{00E6CB69-A72E-4690-A1D8-8AB72668AF72}" type="slidenum">
+            <a:fld id="{BB76A889-8F4A-4A57-BCF1-CECB94D4DFF4}" type="slidenum">
               <a:t>&lt;#&gt;</a:t>
             </a:fld>
           </a:p>
@@ -6980,7 +6980,7 @@
         <p:txBody>
           <a:bodyPr/>
           <a:p>
-            <a:fld id="{872891D2-BD65-4372-987B-151D650C0700}" type="slidenum">
+            <a:fld id="{3048D068-E1E4-403D-9CAB-8AB34B2D25E0}" type="slidenum">
               <a:t>&lt;#&gt;</a:t>
             </a:fld>
           </a:p>
@@ -7042,7 +7042,7 @@
         <p:txBody>
           <a:bodyPr/>
           <a:p>
-            <a:fld id="{27F20C58-5C4A-4FCC-A1B3-E1F2413CFF0E}" type="slidenum">
+            <a:fld id="{138611B3-EBCE-4B2A-9AEE-8F57AFB92660}" type="slidenum">
               <a:t>&lt;#&gt;</a:t>
             </a:fld>
           </a:p>
@@ -7104,7 +7104,7 @@
         <p:txBody>
           <a:bodyPr/>
           <a:p>
-            <a:fld id="{9A6525B7-ADDB-4AC2-B105-34253458606F}" type="slidenum">
+            <a:fld id="{4BE1D2CE-93E4-4C6F-8633-6FE4E9ED2E04}" type="slidenum">
               <a:t>&lt;#&gt;</a:t>
             </a:fld>
           </a:p>
@@ -7166,7 +7166,7 @@
         <p:txBody>
           <a:bodyPr/>
           <a:p>
-            <a:fld id="{F9F6628F-8524-4617-A517-F25B42638D90}" type="slidenum">
+            <a:fld id="{56A78C55-5675-4757-B7FD-9E23D4BECE75}" type="slidenum">
               <a:t>&lt;#&gt;</a:t>
             </a:fld>
           </a:p>
@@ -7268,7 +7268,7 @@
         <p:txBody>
           <a:bodyPr/>
           <a:p>
-            <a:fld id="{6BDA5EA0-2386-4905-BC7F-8893D7FF21A3}" type="slidenum">
+            <a:fld id="{E702088A-99FB-4A2D-80DA-337E71A76030}" type="slidenum">
               <a:t>&lt;#&gt;</a:t>
             </a:fld>
           </a:p>
@@ -7330,7 +7330,7 @@
         <p:txBody>
           <a:bodyPr/>
           <a:p>
-            <a:fld id="{765C5698-3D77-4D0E-A0EC-B5793A2EE325}" type="slidenum">
+            <a:fld id="{80F5F712-2796-46CE-A2D5-2C447CC8D6B8}" type="slidenum">
               <a:t>&lt;#&gt;</a:t>
             </a:fld>
           </a:p>
@@ -7392,7 +7392,7 @@
         <p:txBody>
           <a:bodyPr/>
           <a:p>
-            <a:fld id="{39E193AF-2C29-4188-A323-6B7B52730856}" type="slidenum">
+            <a:fld id="{15B2C93D-33C5-42C9-AA41-C0F748C641B8}" type="slidenum">
               <a:t>&lt;#&gt;</a:t>
             </a:fld>
           </a:p>
@@ -14200,7 +14200,7 @@
               </a:lnSpc>
               <a:buNone/>
             </a:pPr>
-            <a:fld id="{BB7DE620-9FCC-4A71-9A4E-9647673826D9}" type="slidenum">
+            <a:fld id="{B068272C-92FB-4737-BEB0-45482F397C4E}" type="slidenum">
               <a:rPr b="0" lang="de-DE" sz="800" spc="-1" strike="noStrike">
                 <a:solidFill>
                   <a:schemeClr val="dk1"/>
@@ -14426,7 +14426,7 @@
               </a:lnSpc>
               <a:buNone/>
             </a:pPr>
-            <a:fld id="{0D8F281C-2887-4885-AD01-44AC1EFD274C}" type="slidenum">
+            <a:fld id="{C3958A9C-0ED0-4EF5-8373-600324907169}" type="slidenum">
               <a:rPr b="0" lang="de-DE" sz="800" spc="-1" strike="noStrike">
                 <a:solidFill>
                   <a:schemeClr val="lt1"/>
@@ -15148,7 +15148,7 @@
               </a:lnSpc>
               <a:buNone/>
             </a:pPr>
-            <a:fld id="{787338BA-7D0D-4F30-BB71-E71319401A09}" type="slidenum">
+            <a:fld id="{B3C5C7C1-3E10-4DAC-B9A3-65D4831B01CF}" type="slidenum">
               <a:rPr b="0" lang="de-DE" sz="800" spc="-1" strike="noStrike">
                 <a:solidFill>
                   <a:schemeClr val="lt1"/>
@@ -15593,7 +15593,7 @@
               </a:lnSpc>
               <a:buNone/>
             </a:pPr>
-            <a:fld id="{B0269E20-60A1-42E3-B1D3-C0650B1BA53E}" type="slidenum">
+            <a:fld id="{671E915D-BB54-459F-837B-30B1AC420EB8}" type="slidenum">
               <a:rPr b="0" lang="de-DE" sz="800" spc="-1" strike="noStrike">
                 <a:solidFill>
                   <a:schemeClr val="dk1"/>
@@ -16148,7 +16148,7 @@
               </a:lnSpc>
               <a:buNone/>
             </a:pPr>
-            <a:fld id="{73897254-FB5A-412F-A37C-DF97EF834B82}" type="slidenum">
+            <a:fld id="{4F6036CA-BC4F-43CB-AB26-C5616769B6DD}" type="slidenum">
               <a:rPr b="0" lang="de-DE" sz="800" spc="-1" strike="noStrike">
                 <a:solidFill>
                   <a:schemeClr val="dk1"/>
@@ -16788,7 +16788,7 @@
               </a:lnSpc>
               <a:buNone/>
             </a:pPr>
-            <a:fld id="{4BEA2C62-69E7-47EA-A073-3E7AA4FA03C3}" type="slidenum">
+            <a:fld id="{8F5FE087-2C2F-4E98-A2D4-33F2DCE8DA55}" type="slidenum">
               <a:rPr b="0" lang="de-DE" sz="800" spc="-1" strike="noStrike">
                 <a:solidFill>
                   <a:schemeClr val="dk1"/>
@@ -17569,7 +17569,7 @@
               </a:lnSpc>
               <a:buNone/>
             </a:pPr>
-            <a:fld id="{6C685909-2503-4451-8A79-C2FEC948CAC2}" type="slidenum">
+            <a:fld id="{78F2D847-E6C3-4B34-8604-F3E5F56DD458}" type="slidenum">
               <a:rPr b="0" lang="de-DE" sz="800" spc="-1" strike="noStrike">
                 <a:solidFill>
                   <a:schemeClr val="dk1"/>
@@ -18288,7 +18288,7 @@
               </a:lnSpc>
               <a:buNone/>
             </a:pPr>
-            <a:fld id="{AEC63D1B-A579-42A8-877C-EC38990A3176}" type="slidenum">
+            <a:fld id="{3BFF4638-DB9E-4796-BEC1-ED3F2F7BBCF2}" type="slidenum">
               <a:rPr b="0" lang="de-DE" sz="800" spc="-1" strike="noStrike">
                 <a:solidFill>
                   <a:schemeClr val="dk1"/>
@@ -18842,7 +18842,7 @@
               </a:lnSpc>
               <a:buNone/>
             </a:pPr>
-            <a:fld id="{1EEBA9D6-1F78-4363-B979-DBDD15336367}" type="slidenum">
+            <a:fld id="{90F358D8-4D7B-43BD-B64D-20E8CA9C42A8}" type="slidenum">
               <a:rPr b="0" lang="de-DE" sz="800" spc="-1" strike="noStrike">
                 <a:solidFill>
                   <a:schemeClr val="dk1"/>
@@ -19068,7 +19068,7 @@
               </a:lnSpc>
               <a:buNone/>
             </a:pPr>
-            <a:fld id="{D693C838-3106-4E54-9BD9-4A6BE4CC6733}" type="slidenum">
+            <a:fld id="{E07C2FA6-416A-4DFE-A2F6-DD3D0C43EEA2}" type="slidenum">
               <a:rPr b="0" lang="de-DE" sz="800" spc="-1" strike="noStrike">
                 <a:solidFill>
                   <a:schemeClr val="dk1"/>
@@ -19738,7 +19738,7 @@
               </a:lnSpc>
               <a:buNone/>
             </a:pPr>
-            <a:fld id="{81FBA132-410B-4AAF-87AE-60FE0F05D65E}" type="slidenum">
+            <a:fld id="{5F05AE50-B94A-4D5D-BF7C-5B04D80BE7EF}" type="slidenum">
               <a:rPr b="0" lang="de-DE" sz="800" spc="-1" strike="noStrike">
                 <a:solidFill>
                   <a:schemeClr val="dk1"/>
@@ -20016,7 +20016,7 @@
               </a:lnSpc>
               <a:buNone/>
             </a:pPr>
-            <a:fld id="{D30235BF-F4D5-4CDE-9DD3-E70100AE199D}" type="slidenum">
+            <a:fld id="{638E2BCD-D2D5-4F1B-837C-3C74BBEE25CB}" type="slidenum">
               <a:rPr b="0" lang="de-DE" sz="800" spc="-1" strike="noStrike">
                 <a:solidFill>
                   <a:schemeClr val="dk1"/>
@@ -41955,7 +41955,7 @@
                 </a:solidFill>
                 <a:latin typeface="Noto Sans"/>
               </a:rPr>
-              <a:t>Vielen Dank für eure Aufmerksamkeit</a:t>
+              <a:t>Vielen Dank für Ihre Aufmerksamkeit</a:t>
             </a:r>
             <a:endParaRPr b="0" lang="en-US" sz="3859" spc="-1" strike="noStrike">
               <a:solidFill>
